--- a/ai/src/ppt dataset/Grey Black Minimalist Simple Project Presentation.pptx
+++ b/ai/src/ppt dataset/Grey Black Minimalist Simple Project Presentation.pptx
@@ -3140,6 +3140,10 @@
             </a:stretch>
           </a:blipFill>
         </p:spPr>
+        <p:txBody>
+          <a:bodyPr/>
+          <a:p/>
+        </p:txBody>
       </p:sp>
       <p:sp>
         <p:nvSpPr>
@@ -3192,6 +3196,10 @@
             </a:stretch>
           </a:blipFill>
         </p:spPr>
+        <p:txBody>
+          <a:bodyPr/>
+          <a:p/>
+        </p:txBody>
       </p:sp>
       <p:sp>
         <p:nvSpPr>
@@ -3244,6 +3252,10 @@
             </a:stretch>
           </a:blipFill>
         </p:spPr>
+        <p:txBody>
+          <a:bodyPr/>
+          <a:p/>
+        </p:txBody>
       </p:sp>
       <p:sp>
         <p:nvSpPr>
@@ -3296,6 +3308,10 @@
             </a:stretch>
           </a:blipFill>
         </p:spPr>
+        <p:txBody>
+          <a:bodyPr/>
+          <a:p/>
+        </p:txBody>
       </p:sp>
       <p:grpSp>
         <p:nvGrpSpPr>
@@ -3509,25 +3525,7 @@
             <a:spAutoFit/>
           </a:bodyPr>
           <a:lstStyle/>
-          <a:p>
-            <a:pPr algn="ctr">
-              <a:lnSpc>
-                <a:spcPts val="16099"/>
-              </a:lnSpc>
-            </a:pPr>
-            <a:r>
-              <a:rPr lang="en-US" b="true" sz="11499">
-                <a:solidFill>
-                  <a:srgbClr val="000000"/>
-                </a:solidFill>
-                <a:latin typeface="Proxima Nova Bold"/>
-                <a:ea typeface="Proxima Nova Bold"/>
-                <a:cs typeface="Proxima Nova Bold"/>
-                <a:sym typeface="Proxima Nova Bold"/>
-              </a:rPr>
-              <a:t>PRESENTATION</a:t>
-            </a:r>
-          </a:p>
+          <a:p/>
         </p:txBody>
       </p:sp>
       <p:grpSp>
@@ -3679,25 +3677,7 @@
             <a:spAutoFit/>
           </a:bodyPr>
           <a:lstStyle/>
-          <a:p>
-            <a:pPr algn="ctr">
-              <a:lnSpc>
-                <a:spcPts val="6299"/>
-              </a:lnSpc>
-            </a:pPr>
-            <a:r>
-              <a:rPr lang="en-US" sz="4500">
-                <a:solidFill>
-                  <a:srgbClr val="000000"/>
-                </a:solidFill>
-                <a:latin typeface="Nunito"/>
-                <a:ea typeface="Nunito"/>
-                <a:cs typeface="Nunito"/>
-                <a:sym typeface="Nunito"/>
-              </a:rPr>
-              <a:t>By Benjamin Shah</a:t>
-            </a:r>
-          </a:p>
+          <a:p/>
         </p:txBody>
       </p:sp>
     </p:spTree>
@@ -3783,6 +3763,10 @@
             </a:stretch>
           </a:blipFill>
         </p:spPr>
+        <p:txBody>
+          <a:bodyPr/>
+          <a:p/>
+        </p:txBody>
       </p:sp>
       <p:sp>
         <p:nvSpPr>
@@ -3835,6 +3819,10 @@
             </a:stretch>
           </a:blipFill>
         </p:spPr>
+        <p:txBody>
+          <a:bodyPr/>
+          <a:p/>
+        </p:txBody>
       </p:sp>
       <p:sp>
         <p:nvSpPr>
@@ -3887,6 +3875,10 @@
             </a:stretch>
           </a:blipFill>
         </p:spPr>
+        <p:txBody>
+          <a:bodyPr/>
+          <a:p/>
+        </p:txBody>
       </p:sp>
       <p:sp>
         <p:nvSpPr>
@@ -3939,6 +3931,10 @@
             </a:stretch>
           </a:blipFill>
         </p:spPr>
+        <p:txBody>
+          <a:bodyPr/>
+          <a:p/>
+        </p:txBody>
       </p:sp>
       <p:grpSp>
         <p:nvGrpSpPr>
@@ -4087,6 +4083,10 @@
             </a:stretch>
           </a:blipFill>
         </p:spPr>
+        <p:txBody>
+          <a:bodyPr/>
+          <a:p/>
+        </p:txBody>
       </p:sp>
       <p:sp>
         <p:nvSpPr>
@@ -4139,6 +4139,10 @@
             </a:stretch>
           </a:blipFill>
         </p:spPr>
+        <p:txBody>
+          <a:bodyPr/>
+          <a:p/>
+        </p:txBody>
       </p:sp>
       <p:grpSp>
         <p:nvGrpSpPr>
@@ -4256,25 +4260,7 @@
             <a:spAutoFit/>
           </a:bodyPr>
           <a:lstStyle/>
-          <a:p>
-            <a:pPr algn="ctr">
-              <a:lnSpc>
-                <a:spcPts val="18199"/>
-              </a:lnSpc>
-            </a:pPr>
-            <a:r>
-              <a:rPr lang="en-US" b="true" sz="12999">
-                <a:solidFill>
-                  <a:srgbClr val="000000"/>
-                </a:solidFill>
-                <a:latin typeface="Proxima Nova Bold"/>
-                <a:ea typeface="Proxima Nova Bold"/>
-                <a:cs typeface="Proxima Nova Bold"/>
-                <a:sym typeface="Proxima Nova Bold"/>
-              </a:rPr>
-              <a:t>THANK YOU</a:t>
-            </a:r>
-          </a:p>
+          <a:p/>
         </p:txBody>
       </p:sp>
     </p:spTree>
@@ -4360,6 +4346,10 @@
             </a:stretch>
           </a:blipFill>
         </p:spPr>
+        <p:txBody>
+          <a:bodyPr/>
+          <a:p/>
+        </p:txBody>
       </p:sp>
       <p:sp>
         <p:nvSpPr>
@@ -4412,6 +4402,10 @@
             </a:stretch>
           </a:blipFill>
         </p:spPr>
+        <p:txBody>
+          <a:bodyPr/>
+          <a:p/>
+        </p:txBody>
       </p:sp>
       <p:sp>
         <p:nvSpPr>
@@ -4433,25 +4427,7 @@
             <a:spAutoFit/>
           </a:bodyPr>
           <a:lstStyle/>
-          <a:p>
-            <a:pPr algn="ctr">
-              <a:lnSpc>
-                <a:spcPts val="12599"/>
-              </a:lnSpc>
-            </a:pPr>
-            <a:r>
-              <a:rPr lang="en-US" b="true" sz="9000">
-                <a:solidFill>
-                  <a:srgbClr val="000000"/>
-                </a:solidFill>
-                <a:latin typeface="Proxima Nova Bold"/>
-                <a:ea typeface="Proxima Nova Bold"/>
-                <a:cs typeface="Proxima Nova Bold"/>
-                <a:sym typeface="Proxima Nova Bold"/>
-              </a:rPr>
-              <a:t>BACKGROUND</a:t>
-            </a:r>
-          </a:p>
+          <a:p/>
         </p:txBody>
       </p:sp>
       <p:sp>
@@ -4474,51 +4450,7 @@
             <a:spAutoFit/>
           </a:bodyPr>
           <a:lstStyle/>
-          <a:p>
-            <a:pPr algn="ctr">
-              <a:lnSpc>
-                <a:spcPts val="3919"/>
-              </a:lnSpc>
-            </a:pPr>
-            <a:r>
-              <a:rPr lang="en-US" sz="2799">
-                <a:solidFill>
-                  <a:srgbClr val="000000"/>
-                </a:solidFill>
-                <a:latin typeface="Nunito"/>
-                <a:ea typeface="Nunito"/>
-                <a:cs typeface="Nunito"/>
-                <a:sym typeface="Nunito"/>
-              </a:rPr>
-              <a:t>Lorem ipsum dolor sit amet, consectetur adipiscing elit. Praesent rutrum maximus mauris sed sodales. Ut rhoncus lacinia nisi eu tempus. Proin justo eros, mollis laoreet massa non, tincidunt pharetra leo.</a:t>
-            </a:r>
-          </a:p>
-          <a:p>
-            <a:pPr algn="ctr">
-              <a:lnSpc>
-                <a:spcPts val="3919"/>
-              </a:lnSpc>
-            </a:pPr>
-          </a:p>
-          <a:p>
-            <a:pPr algn="ctr">
-              <a:lnSpc>
-                <a:spcPts val="3919"/>
-              </a:lnSpc>
-            </a:pPr>
-            <a:r>
-              <a:rPr lang="en-US" sz="2799">
-                <a:solidFill>
-                  <a:srgbClr val="000000"/>
-                </a:solidFill>
-                <a:latin typeface="Nunito"/>
-                <a:ea typeface="Nunito"/>
-                <a:cs typeface="Nunito"/>
-                <a:sym typeface="Nunito"/>
-              </a:rPr>
-              <a:t>Cras facilisis leo non nibh congue volutpat. Fusce vitae sagittis dolor. Sed magna dolor, molestie vel libero id, tempus malesuada tortor. Duis ullamcorper lacus sed est ultricies, at imperdiet orci scelerisque.</a:t>
-            </a:r>
-          </a:p>
+          <a:p/>
         </p:txBody>
       </p:sp>
       <p:sp>
@@ -4572,6 +4504,10 @@
             </a:stretch>
           </a:blipFill>
         </p:spPr>
+        <p:txBody>
+          <a:bodyPr/>
+          <a:p/>
+        </p:txBody>
       </p:sp>
       <p:sp>
         <p:nvSpPr>
@@ -4624,6 +4560,10 @@
             </a:stretch>
           </a:blipFill>
         </p:spPr>
+        <p:txBody>
+          <a:bodyPr/>
+          <a:p/>
+        </p:txBody>
       </p:sp>
       <p:grpSp>
         <p:nvGrpSpPr>
@@ -4772,6 +4712,10 @@
             </a:stretch>
           </a:blipFill>
         </p:spPr>
+        <p:txBody>
+          <a:bodyPr/>
+          <a:p/>
+        </p:txBody>
       </p:sp>
       <p:sp>
         <p:nvSpPr>
@@ -4824,6 +4768,10 @@
             </a:stretch>
           </a:blipFill>
         </p:spPr>
+        <p:txBody>
+          <a:bodyPr/>
+          <a:p/>
+        </p:txBody>
       </p:sp>
       <p:grpSp>
         <p:nvGrpSpPr>
@@ -5004,6 +4952,10 @@
             </a:stretch>
           </a:blipFill>
         </p:spPr>
+        <p:txBody>
+          <a:bodyPr/>
+          <a:p/>
+        </p:txBody>
       </p:sp>
       <p:sp>
         <p:nvSpPr>
@@ -5056,6 +5008,10 @@
             </a:stretch>
           </a:blipFill>
         </p:spPr>
+        <p:txBody>
+          <a:bodyPr/>
+          <a:p/>
+        </p:txBody>
       </p:sp>
       <p:sp>
         <p:nvSpPr>
@@ -5077,25 +5033,7 @@
             <a:spAutoFit/>
           </a:bodyPr>
           <a:lstStyle/>
-          <a:p>
-            <a:pPr algn="ctr">
-              <a:lnSpc>
-                <a:spcPts val="12599"/>
-              </a:lnSpc>
-            </a:pPr>
-            <a:r>
-              <a:rPr lang="en-US" b="true" sz="9000">
-                <a:solidFill>
-                  <a:srgbClr val="000000"/>
-                </a:solidFill>
-                <a:latin typeface="Proxima Nova Bold"/>
-                <a:ea typeface="Proxima Nova Bold"/>
-                <a:cs typeface="Proxima Nova Bold"/>
-                <a:sym typeface="Proxima Nova Bold"/>
-              </a:rPr>
-              <a:t>PROJECT GOALS</a:t>
-            </a:r>
-          </a:p>
+          <a:p/>
         </p:txBody>
       </p:sp>
       <p:sp>
@@ -5118,25 +5056,7 @@
             <a:spAutoFit/>
           </a:bodyPr>
           <a:lstStyle/>
-          <a:p>
-            <a:pPr algn="l">
-              <a:lnSpc>
-                <a:spcPts val="3919"/>
-              </a:lnSpc>
-            </a:pPr>
-            <a:r>
-              <a:rPr lang="en-US" sz="2799">
-                <a:solidFill>
-                  <a:srgbClr val="000000"/>
-                </a:solidFill>
-                <a:latin typeface="Nunito"/>
-                <a:ea typeface="Nunito"/>
-                <a:cs typeface="Nunito"/>
-                <a:sym typeface="Nunito"/>
-              </a:rPr>
-              <a:t>Lorem ipsum dolor sit amet, consectetur adipiscing elit. Praesent rutrum maximus mauris sed sodales. Ut rhoncus lacinia nisi eu tempus. Proin justo eros, mollis laoreet massa non, tincidunt pharetra leo.</a:t>
-            </a:r>
-          </a:p>
+          <a:p/>
         </p:txBody>
       </p:sp>
       <p:sp>
@@ -5190,6 +5110,10 @@
             </a:stretch>
           </a:blipFill>
         </p:spPr>
+        <p:txBody>
+          <a:bodyPr/>
+          <a:p/>
+        </p:txBody>
       </p:sp>
       <p:sp>
         <p:nvSpPr>
@@ -5242,6 +5166,10 @@
             </a:stretch>
           </a:blipFill>
         </p:spPr>
+        <p:txBody>
+          <a:bodyPr/>
+          <a:p/>
+        </p:txBody>
       </p:sp>
       <p:grpSp>
         <p:nvGrpSpPr>
@@ -5390,6 +5318,10 @@
             </a:stretch>
           </a:blipFill>
         </p:spPr>
+        <p:txBody>
+          <a:bodyPr/>
+          <a:p/>
+        </p:txBody>
       </p:sp>
       <p:sp>
         <p:nvSpPr>
@@ -5442,6 +5374,10 @@
             </a:stretch>
           </a:blipFill>
         </p:spPr>
+        <p:txBody>
+          <a:bodyPr/>
+          <a:p/>
+        </p:txBody>
       </p:sp>
       <p:grpSp>
         <p:nvGrpSpPr>
@@ -5559,25 +5495,7 @@
             <a:spAutoFit/>
           </a:bodyPr>
           <a:lstStyle/>
-          <a:p>
-            <a:pPr algn="l">
-              <a:lnSpc>
-                <a:spcPts val="3919"/>
-              </a:lnSpc>
-            </a:pPr>
-            <a:r>
-              <a:rPr lang="en-US" sz="2799">
-                <a:solidFill>
-                  <a:srgbClr val="000000"/>
-                </a:solidFill>
-                <a:latin typeface="Nunito"/>
-                <a:ea typeface="Nunito"/>
-                <a:cs typeface="Nunito"/>
-                <a:sym typeface="Nunito"/>
-              </a:rPr>
-              <a:t>Lorem ipsum dolor sit amet, consectetur adipiscing elit. Praesent rutrum maximus mauris sed sodales. Ut rhoncus lacinia nisi eu tempus. Proin justo eros, mollis laoreet massa non, tincidunt pharetra leo.</a:t>
-            </a:r>
-          </a:p>
+          <a:p/>
         </p:txBody>
       </p:sp>
       <p:grpSp>
@@ -5792,25 +5710,7 @@
             <a:spAutoFit/>
           </a:bodyPr>
           <a:lstStyle/>
-          <a:p>
-            <a:pPr algn="ctr">
-              <a:lnSpc>
-                <a:spcPts val="3919"/>
-              </a:lnSpc>
-            </a:pPr>
-            <a:r>
-              <a:rPr lang="en-US" sz="2799" b="true">
-                <a:solidFill>
-                  <a:srgbClr val="FFFFFF"/>
-                </a:solidFill>
-                <a:latin typeface="Nunito Bold"/>
-                <a:ea typeface="Nunito Bold"/>
-                <a:cs typeface="Nunito Bold"/>
-                <a:sym typeface="Nunito Bold"/>
-              </a:rPr>
-              <a:t>01</a:t>
-            </a:r>
-          </a:p>
+          <a:p/>
         </p:txBody>
       </p:sp>
       <p:sp>
@@ -5833,25 +5733,7 @@
             <a:spAutoFit/>
           </a:bodyPr>
           <a:lstStyle/>
-          <a:p>
-            <a:pPr algn="ctr">
-              <a:lnSpc>
-                <a:spcPts val="3919"/>
-              </a:lnSpc>
-            </a:pPr>
-            <a:r>
-              <a:rPr lang="en-US" sz="2799" b="true">
-                <a:solidFill>
-                  <a:srgbClr val="FFFFFF"/>
-                </a:solidFill>
-                <a:latin typeface="Nunito Bold"/>
-                <a:ea typeface="Nunito Bold"/>
-                <a:cs typeface="Nunito Bold"/>
-                <a:sym typeface="Nunito Bold"/>
-              </a:rPr>
-              <a:t>02</a:t>
-            </a:r>
-          </a:p>
+          <a:p/>
         </p:txBody>
       </p:sp>
     </p:spTree>
@@ -5937,6 +5819,10 @@
             </a:stretch>
           </a:blipFill>
         </p:spPr>
+        <p:txBody>
+          <a:bodyPr/>
+          <a:p/>
+        </p:txBody>
       </p:sp>
       <p:sp>
         <p:nvSpPr>
@@ -5989,6 +5875,10 @@
             </a:stretch>
           </a:blipFill>
         </p:spPr>
+        <p:txBody>
+          <a:bodyPr/>
+          <a:p/>
+        </p:txBody>
       </p:sp>
       <p:sp>
         <p:nvSpPr>
@@ -6041,6 +5931,10 @@
             </a:stretch>
           </a:blipFill>
         </p:spPr>
+        <p:txBody>
+          <a:bodyPr/>
+          <a:p/>
+        </p:txBody>
       </p:sp>
       <p:sp>
         <p:nvSpPr>
@@ -6093,6 +5987,10 @@
             </a:stretch>
           </a:blipFill>
         </p:spPr>
+        <p:txBody>
+          <a:bodyPr/>
+          <a:p/>
+        </p:txBody>
       </p:sp>
       <p:grpSp>
         <p:nvGrpSpPr>
@@ -6241,6 +6139,10 @@
             </a:stretch>
           </a:blipFill>
         </p:spPr>
+        <p:txBody>
+          <a:bodyPr/>
+          <a:p/>
+        </p:txBody>
       </p:sp>
       <p:sp>
         <p:nvSpPr>
@@ -6293,6 +6195,10 @@
             </a:stretch>
           </a:blipFill>
         </p:spPr>
+        <p:txBody>
+          <a:bodyPr/>
+          <a:p/>
+        </p:txBody>
       </p:sp>
       <p:grpSp>
         <p:nvGrpSpPr>
@@ -6435,6 +6341,10 @@
             </a:stretch>
           </a:blipFill>
         </p:spPr>
+        <p:txBody>
+          <a:bodyPr/>
+          <a:p/>
+        </p:txBody>
       </p:sp>
       <p:sp>
         <p:nvSpPr>
@@ -6456,25 +6366,7 @@
             <a:spAutoFit/>
           </a:bodyPr>
           <a:lstStyle/>
-          <a:p>
-            <a:pPr algn="ctr">
-              <a:lnSpc>
-                <a:spcPts val="12599"/>
-              </a:lnSpc>
-            </a:pPr>
-            <a:r>
-              <a:rPr lang="en-US" b="true" sz="9000">
-                <a:solidFill>
-                  <a:srgbClr val="000000"/>
-                </a:solidFill>
-                <a:latin typeface="Proxima Nova Bold"/>
-                <a:ea typeface="Proxima Nova Bold"/>
-                <a:cs typeface="Proxima Nova Bold"/>
-                <a:sym typeface="Proxima Nova Bold"/>
-              </a:rPr>
-              <a:t>SUBJECT 01</a:t>
-            </a:r>
-          </a:p>
+          <a:p/>
         </p:txBody>
       </p:sp>
       <p:sp>
@@ -6497,25 +6389,7 @@
             <a:spAutoFit/>
           </a:bodyPr>
           <a:lstStyle/>
-          <a:p>
-            <a:pPr algn="l">
-              <a:lnSpc>
-                <a:spcPts val="3919"/>
-              </a:lnSpc>
-            </a:pPr>
-            <a:r>
-              <a:rPr lang="en-US" sz="2799">
-                <a:solidFill>
-                  <a:srgbClr val="000000"/>
-                </a:solidFill>
-                <a:latin typeface="Nunito"/>
-                <a:ea typeface="Nunito"/>
-                <a:cs typeface="Nunito"/>
-                <a:sym typeface="Nunito"/>
-              </a:rPr>
-              <a:t>Lorem ipsum dolor sit amet, consectetur adipiscing elit. Praesent rutrum maximus mauris sed sodales. Ut rhoncus lacinia nisi eu tempus. Proin justo eros, mollis laoreet massa non, tincidunt pharetra leo. Cras facilisis leo non nibh congue volutpat.</a:t>
-            </a:r>
-          </a:p>
+          <a:p/>
         </p:txBody>
       </p:sp>
     </p:spTree>
@@ -6601,6 +6475,10 @@
             </a:stretch>
           </a:blipFill>
         </p:spPr>
+        <p:txBody>
+          <a:bodyPr/>
+          <a:p/>
+        </p:txBody>
       </p:sp>
       <p:sp>
         <p:nvSpPr>
@@ -6653,6 +6531,10 @@
             </a:stretch>
           </a:blipFill>
         </p:spPr>
+        <p:txBody>
+          <a:bodyPr/>
+          <a:p/>
+        </p:txBody>
       </p:sp>
       <p:sp>
         <p:nvSpPr>
@@ -6705,6 +6587,10 @@
             </a:stretch>
           </a:blipFill>
         </p:spPr>
+        <p:txBody>
+          <a:bodyPr/>
+          <a:p/>
+        </p:txBody>
       </p:sp>
       <p:sp>
         <p:nvSpPr>
@@ -6757,6 +6643,10 @@
             </a:stretch>
           </a:blipFill>
         </p:spPr>
+        <p:txBody>
+          <a:bodyPr/>
+          <a:p/>
+        </p:txBody>
       </p:sp>
       <p:grpSp>
         <p:nvGrpSpPr>
@@ -6905,6 +6795,10 @@
             </a:stretch>
           </a:blipFill>
         </p:spPr>
+        <p:txBody>
+          <a:bodyPr/>
+          <a:p/>
+        </p:txBody>
       </p:sp>
       <p:sp>
         <p:nvSpPr>
@@ -6957,6 +6851,10 @@
             </a:stretch>
           </a:blipFill>
         </p:spPr>
+        <p:txBody>
+          <a:bodyPr/>
+          <a:p/>
+        </p:txBody>
       </p:sp>
       <p:grpSp>
         <p:nvGrpSpPr>
@@ -7074,25 +6972,7 @@
             <a:spAutoFit/>
           </a:bodyPr>
           <a:lstStyle/>
-          <a:p>
-            <a:pPr algn="ctr">
-              <a:lnSpc>
-                <a:spcPts val="12599"/>
-              </a:lnSpc>
-            </a:pPr>
-            <a:r>
-              <a:rPr lang="en-US" b="true" sz="9000">
-                <a:solidFill>
-                  <a:srgbClr val="000000"/>
-                </a:solidFill>
-                <a:latin typeface="Proxima Nova Bold"/>
-                <a:ea typeface="Proxima Nova Bold"/>
-                <a:cs typeface="Proxima Nova Bold"/>
-                <a:sym typeface="Proxima Nova Bold"/>
-              </a:rPr>
-              <a:t>SUBJECT 02</a:t>
-            </a:r>
-          </a:p>
+          <a:p/>
         </p:txBody>
       </p:sp>
       <p:sp>
@@ -7115,51 +6995,9 @@
             <a:spAutoFit/>
           </a:bodyPr>
           <a:lstStyle/>
-          <a:p>
-            <a:pPr algn="l">
-              <a:lnSpc>
-                <a:spcPts val="3919"/>
-              </a:lnSpc>
-            </a:pPr>
-            <a:r>
-              <a:rPr lang="en-US" sz="2799">
-                <a:solidFill>
-                  <a:srgbClr val="000000"/>
-                </a:solidFill>
-                <a:latin typeface="Nunito"/>
-                <a:ea typeface="Nunito"/>
-                <a:cs typeface="Nunito"/>
-                <a:sym typeface="Nunito"/>
-              </a:rPr>
-              <a:t>Lorem ipsum dolor sit amet, consectetur adipiscing elit. Praesent rutrum maximus mauris sed sodales. Ut rhoncus lacinia nisi eu tempus. Proin justo eros, mollis laoreet massa non, tincidunt pharetra leo. Cras facilisis leo non nibh congue volutpat. Fusce vitae sagittis dolor.</a:t>
-            </a:r>
-          </a:p>
-        </p:txBody>
-      </p:sp>
-      <p:pic>
-        <p:nvPicPr>
-          <p:cNvPr name="Picture 16" id="16"/>
-          <p:cNvPicPr>
-            <a:picLocks noChangeAspect="true"/>
-          </p:cNvPicPr>
-          <p:nvPr/>
-        </p:nvPicPr>
-        <p:blipFill>
-          <a:blip r:embed="rId4"/>
-          <a:stretch>
-            <a:fillRect/>
-          </a:stretch>
-        </p:blipFill>
-        <p:spPr>
-          <a:xfrm rot="0">
-            <a:off x="982194" y="2589581"/>
-            <a:ext cx="8640466" cy="6099491"/>
-          </a:xfrm>
-          <a:prstGeom prst="rect">
-            <a:avLst/>
-          </a:prstGeom>
-        </p:spPr>
-      </p:pic>
+          <a:p/>
+        </p:txBody>
+      </p:sp>
     </p:spTree>
   </p:cSld>
   <p:clrMapOvr>
@@ -7243,6 +7081,10 @@
             </a:stretch>
           </a:blipFill>
         </p:spPr>
+        <p:txBody>
+          <a:bodyPr/>
+          <a:p/>
+        </p:txBody>
       </p:sp>
       <p:sp>
         <p:nvSpPr>
@@ -7295,6 +7137,10 @@
             </a:stretch>
           </a:blipFill>
         </p:spPr>
+        <p:txBody>
+          <a:bodyPr/>
+          <a:p/>
+        </p:txBody>
       </p:sp>
       <p:sp>
         <p:nvSpPr>
@@ -7347,6 +7193,10 @@
             </a:stretch>
           </a:blipFill>
         </p:spPr>
+        <p:txBody>
+          <a:bodyPr/>
+          <a:p/>
+        </p:txBody>
       </p:sp>
       <p:sp>
         <p:nvSpPr>
@@ -7399,6 +7249,10 @@
             </a:stretch>
           </a:blipFill>
         </p:spPr>
+        <p:txBody>
+          <a:bodyPr/>
+          <a:p/>
+        </p:txBody>
       </p:sp>
       <p:grpSp>
         <p:nvGrpSpPr>
@@ -7547,6 +7401,10 @@
             </a:stretch>
           </a:blipFill>
         </p:spPr>
+        <p:txBody>
+          <a:bodyPr/>
+          <a:p/>
+        </p:txBody>
       </p:sp>
       <p:sp>
         <p:nvSpPr>
@@ -7599,6 +7457,10 @@
             </a:stretch>
           </a:blipFill>
         </p:spPr>
+        <p:txBody>
+          <a:bodyPr/>
+          <a:p/>
+        </p:txBody>
       </p:sp>
       <p:grpSp>
         <p:nvGrpSpPr>
@@ -7716,25 +7578,7 @@
             <a:spAutoFit/>
           </a:bodyPr>
           <a:lstStyle/>
-          <a:p>
-            <a:pPr algn="ctr">
-              <a:lnSpc>
-                <a:spcPts val="12599"/>
-              </a:lnSpc>
-            </a:pPr>
-            <a:r>
-              <a:rPr lang="en-US" b="true" sz="9000">
-                <a:solidFill>
-                  <a:srgbClr val="000000"/>
-                </a:solidFill>
-                <a:latin typeface="Proxima Nova Bold"/>
-                <a:ea typeface="Proxima Nova Bold"/>
-                <a:cs typeface="Proxima Nova Bold"/>
-                <a:sym typeface="Proxima Nova Bold"/>
-              </a:rPr>
-              <a:t>SUBJECT 03</a:t>
-            </a:r>
-          </a:p>
+          <a:p/>
         </p:txBody>
       </p:sp>
       <p:grpSp>
@@ -7886,25 +7730,7 @@
             <a:spAutoFit/>
           </a:bodyPr>
           <a:lstStyle/>
-          <a:p>
-            <a:pPr algn="just">
-              <a:lnSpc>
-                <a:spcPts val="3919"/>
-              </a:lnSpc>
-            </a:pPr>
-            <a:r>
-              <a:rPr lang="en-US" sz="2799">
-                <a:solidFill>
-                  <a:srgbClr val="000000"/>
-                </a:solidFill>
-                <a:latin typeface="Nunito"/>
-                <a:ea typeface="Nunito"/>
-                <a:cs typeface="Nunito"/>
-                <a:sym typeface="Nunito"/>
-              </a:rPr>
-              <a:t>Lorem ipsum dolor sit amet, consectetur adipiscing elit. Praesent rutrum maximus mauris sed sodales. Ut rhoncus lacinia nisi eu tempus. Proin justo eros, mollis laoreet massa non, tincidunt pharetra leo.</a:t>
-            </a:r>
-          </a:p>
+          <a:p/>
         </p:txBody>
       </p:sp>
       <p:grpSp>
@@ -8041,25 +7867,7 @@
             <a:spAutoFit/>
           </a:bodyPr>
           <a:lstStyle/>
-          <a:p>
-            <a:pPr algn="ctr">
-              <a:lnSpc>
-                <a:spcPts val="12599"/>
-              </a:lnSpc>
-            </a:pPr>
-            <a:r>
-              <a:rPr lang="en-US" b="true" sz="9000">
-                <a:solidFill>
-                  <a:srgbClr val="000000"/>
-                </a:solidFill>
-                <a:latin typeface="Proxima Nova Bold"/>
-                <a:ea typeface="Proxima Nova Bold"/>
-                <a:cs typeface="Proxima Nova Bold"/>
-                <a:sym typeface="Proxima Nova Bold"/>
-              </a:rPr>
-              <a:t>01</a:t>
-            </a:r>
-          </a:p>
+          <a:p/>
         </p:txBody>
       </p:sp>
       <p:grpSp>
@@ -8211,25 +8019,7 @@
             <a:spAutoFit/>
           </a:bodyPr>
           <a:lstStyle/>
-          <a:p>
-            <a:pPr algn="just">
-              <a:lnSpc>
-                <a:spcPts val="3919"/>
-              </a:lnSpc>
-            </a:pPr>
-            <a:r>
-              <a:rPr lang="en-US" sz="2799">
-                <a:solidFill>
-                  <a:srgbClr val="000000"/>
-                </a:solidFill>
-                <a:latin typeface="Nunito"/>
-                <a:ea typeface="Nunito"/>
-                <a:cs typeface="Nunito"/>
-                <a:sym typeface="Nunito"/>
-              </a:rPr>
-              <a:t>Lorem ipsum dolor sit amet, consectetur adipiscing elit. Praesent rutrum maximus mauris sed sodales. Ut rhoncus lacinia nisi eu tempus. Proin justo eros, mollis laoreet massa non, tincidunt pharetra leo.</a:t>
-            </a:r>
-          </a:p>
+          <a:p/>
         </p:txBody>
       </p:sp>
       <p:grpSp>
@@ -8366,25 +8156,7 @@
             <a:spAutoFit/>
           </a:bodyPr>
           <a:lstStyle/>
-          <a:p>
-            <a:pPr algn="ctr">
-              <a:lnSpc>
-                <a:spcPts val="12599"/>
-              </a:lnSpc>
-            </a:pPr>
-            <a:r>
-              <a:rPr lang="en-US" b="true" sz="9000">
-                <a:solidFill>
-                  <a:srgbClr val="000000"/>
-                </a:solidFill>
-                <a:latin typeface="Proxima Nova Bold"/>
-                <a:ea typeface="Proxima Nova Bold"/>
-                <a:cs typeface="Proxima Nova Bold"/>
-                <a:sym typeface="Proxima Nova Bold"/>
-              </a:rPr>
-              <a:t>02</a:t>
-            </a:r>
-          </a:p>
+          <a:p/>
         </p:txBody>
       </p:sp>
     </p:spTree>
@@ -8470,6 +8242,10 @@
             </a:stretch>
           </a:blipFill>
         </p:spPr>
+        <p:txBody>
+          <a:bodyPr/>
+          <a:p/>
+        </p:txBody>
       </p:sp>
       <p:sp>
         <p:nvSpPr>
@@ -8522,6 +8298,10 @@
             </a:stretch>
           </a:blipFill>
         </p:spPr>
+        <p:txBody>
+          <a:bodyPr/>
+          <a:p/>
+        </p:txBody>
       </p:sp>
       <p:sp>
         <p:nvSpPr>
@@ -8574,6 +8354,10 @@
             </a:stretch>
           </a:blipFill>
         </p:spPr>
+        <p:txBody>
+          <a:bodyPr/>
+          <a:p/>
+        </p:txBody>
       </p:sp>
       <p:sp>
         <p:nvSpPr>
@@ -8626,6 +8410,10 @@
             </a:stretch>
           </a:blipFill>
         </p:spPr>
+        <p:txBody>
+          <a:bodyPr/>
+          <a:p/>
+        </p:txBody>
       </p:sp>
       <p:grpSp>
         <p:nvGrpSpPr>
@@ -8774,6 +8562,10 @@
             </a:stretch>
           </a:blipFill>
         </p:spPr>
+        <p:txBody>
+          <a:bodyPr/>
+          <a:p/>
+        </p:txBody>
       </p:sp>
       <p:sp>
         <p:nvSpPr>
@@ -8826,6 +8618,10 @@
             </a:stretch>
           </a:blipFill>
         </p:spPr>
+        <p:txBody>
+          <a:bodyPr/>
+          <a:p/>
+        </p:txBody>
       </p:sp>
       <p:grpSp>
         <p:nvGrpSpPr>
@@ -8943,25 +8739,7 @@
             <a:spAutoFit/>
           </a:bodyPr>
           <a:lstStyle/>
-          <a:p>
-            <a:pPr algn="ctr">
-              <a:lnSpc>
-                <a:spcPts val="12599"/>
-              </a:lnSpc>
-            </a:pPr>
-            <a:r>
-              <a:rPr lang="en-US" b="true" sz="9000">
-                <a:solidFill>
-                  <a:srgbClr val="000000"/>
-                </a:solidFill>
-                <a:latin typeface="Proxima Nova Bold"/>
-                <a:ea typeface="Proxima Nova Bold"/>
-                <a:cs typeface="Proxima Nova Bold"/>
-                <a:sym typeface="Proxima Nova Bold"/>
-              </a:rPr>
-              <a:t>ANALYSIS</a:t>
-            </a:r>
-          </a:p>
+          <a:p/>
         </p:txBody>
       </p:sp>
       <p:sp>
@@ -8984,25 +8762,7 @@
             <a:spAutoFit/>
           </a:bodyPr>
           <a:lstStyle/>
-          <a:p>
-            <a:pPr algn="just">
-              <a:lnSpc>
-                <a:spcPts val="3919"/>
-              </a:lnSpc>
-            </a:pPr>
-            <a:r>
-              <a:rPr lang="en-US" sz="2799">
-                <a:solidFill>
-                  <a:srgbClr val="000000"/>
-                </a:solidFill>
-                <a:latin typeface="Nunito"/>
-                <a:ea typeface="Nunito"/>
-                <a:cs typeface="Nunito"/>
-                <a:sym typeface="Nunito"/>
-              </a:rPr>
-              <a:t>Lorem ipsum dolor sit amet, consectetur adipiscing elit. Praesent rutrum maximus mauris sed sodales. Ut rhoncus lacinia nisi eu tempus. Proin justo eros, mollis laoreet massa non, tincidunt pharetra leo. Cras facilisis leo non nibh congue volutpat. Fusce vitae sagittis dolor. Sed magna dolor, molestie vel libero id, tempus malesuada tortor. Duis ullamcorper lacus sed est ultricies, at imperdiet orci scelerisque.</a:t>
-            </a:r>
-          </a:p>
+          <a:p/>
         </p:txBody>
       </p:sp>
     </p:spTree>
@@ -9088,6 +8848,10 @@
             </a:stretch>
           </a:blipFill>
         </p:spPr>
+        <p:txBody>
+          <a:bodyPr/>
+          <a:p/>
+        </p:txBody>
       </p:sp>
       <p:sp>
         <p:nvSpPr>
@@ -9140,6 +8904,10 @@
             </a:stretch>
           </a:blipFill>
         </p:spPr>
+        <p:txBody>
+          <a:bodyPr/>
+          <a:p/>
+        </p:txBody>
       </p:sp>
       <p:sp>
         <p:nvSpPr>
@@ -9192,6 +8960,10 @@
             </a:stretch>
           </a:blipFill>
         </p:spPr>
+        <p:txBody>
+          <a:bodyPr/>
+          <a:p/>
+        </p:txBody>
       </p:sp>
       <p:sp>
         <p:nvSpPr>
@@ -9244,6 +9016,10 @@
             </a:stretch>
           </a:blipFill>
         </p:spPr>
+        <p:txBody>
+          <a:bodyPr/>
+          <a:p/>
+        </p:txBody>
       </p:sp>
       <p:grpSp>
         <p:nvGrpSpPr>
@@ -9392,6 +9168,10 @@
             </a:stretch>
           </a:blipFill>
         </p:spPr>
+        <p:txBody>
+          <a:bodyPr/>
+          <a:p/>
+        </p:txBody>
       </p:sp>
       <p:sp>
         <p:nvSpPr>
@@ -9444,6 +9224,10 @@
             </a:stretch>
           </a:blipFill>
         </p:spPr>
+        <p:txBody>
+          <a:bodyPr/>
+          <a:p/>
+        </p:txBody>
       </p:sp>
       <p:grpSp>
         <p:nvGrpSpPr>
@@ -9561,25 +9345,7 @@
             <a:spAutoFit/>
           </a:bodyPr>
           <a:lstStyle/>
-          <a:p>
-            <a:pPr algn="ctr">
-              <a:lnSpc>
-                <a:spcPts val="12599"/>
-              </a:lnSpc>
-            </a:pPr>
-            <a:r>
-              <a:rPr lang="en-US" b="true" sz="9000">
-                <a:solidFill>
-                  <a:srgbClr val="000000"/>
-                </a:solidFill>
-                <a:latin typeface="Proxima Nova Bold"/>
-                <a:ea typeface="Proxima Nova Bold"/>
-                <a:cs typeface="Proxima Nova Bold"/>
-                <a:sym typeface="Proxima Nova Bold"/>
-              </a:rPr>
-              <a:t>RESULT</a:t>
-            </a:r>
-          </a:p>
+          <a:p/>
         </p:txBody>
       </p:sp>
       <p:grpSp>
@@ -9853,6 +9619,10 @@
             </a:stretch>
           </a:blipFill>
         </p:spPr>
+        <p:txBody>
+          <a:bodyPr/>
+          <a:p/>
+        </p:txBody>
       </p:sp>
       <p:sp>
         <p:nvSpPr>
@@ -9874,25 +9644,7 @@
             <a:spAutoFit/>
           </a:bodyPr>
           <a:lstStyle/>
-          <a:p>
-            <a:pPr algn="just">
-              <a:lnSpc>
-                <a:spcPts val="3919"/>
-              </a:lnSpc>
-            </a:pPr>
-            <a:r>
-              <a:rPr lang="en-US" sz="2799">
-                <a:solidFill>
-                  <a:srgbClr val="000000"/>
-                </a:solidFill>
-                <a:latin typeface="Nunito"/>
-                <a:ea typeface="Nunito"/>
-                <a:cs typeface="Nunito"/>
-                <a:sym typeface="Nunito"/>
-              </a:rPr>
-              <a:t>Lorem ipsum dolor sit amet, consectetur adipiscing elit. Praesent rutrum maximus mauris sed sodales. Ut rhoncus lacinia nisi eu tempus. Proin justo eros, mollis laoreet massa non, tincidunt pharetra leo.</a:t>
-            </a:r>
-          </a:p>
+          <a:p/>
         </p:txBody>
       </p:sp>
       <p:grpSp>
@@ -10166,6 +9918,10 @@
             </a:stretch>
           </a:blipFill>
         </p:spPr>
+        <p:txBody>
+          <a:bodyPr/>
+          <a:p/>
+        </p:txBody>
       </p:sp>
       <p:sp>
         <p:nvSpPr>
@@ -10187,25 +9943,7 @@
             <a:spAutoFit/>
           </a:bodyPr>
           <a:lstStyle/>
-          <a:p>
-            <a:pPr algn="just">
-              <a:lnSpc>
-                <a:spcPts val="3919"/>
-              </a:lnSpc>
-            </a:pPr>
-            <a:r>
-              <a:rPr lang="en-US" sz="2799">
-                <a:solidFill>
-                  <a:srgbClr val="000000"/>
-                </a:solidFill>
-                <a:latin typeface="Nunito"/>
-                <a:ea typeface="Nunito"/>
-                <a:cs typeface="Nunito"/>
-                <a:sym typeface="Nunito"/>
-              </a:rPr>
-              <a:t>Lorem ipsum dolor sit amet, consectetur adipiscing elit. Praesent rutrum maximus mauris sed sodales. Ut rhoncus lacinia nisi eu tempus. Proin justo eros, mollis laoreet massa non, tincidunt pharetra leo.</a:t>
-            </a:r>
-          </a:p>
+          <a:p/>
         </p:txBody>
       </p:sp>
     </p:spTree>
@@ -10291,6 +10029,10 @@
             </a:stretch>
           </a:blipFill>
         </p:spPr>
+        <p:txBody>
+          <a:bodyPr/>
+          <a:p/>
+        </p:txBody>
       </p:sp>
       <p:sp>
         <p:nvSpPr>
@@ -10343,6 +10085,10 @@
             </a:stretch>
           </a:blipFill>
         </p:spPr>
+        <p:txBody>
+          <a:bodyPr/>
+          <a:p/>
+        </p:txBody>
       </p:sp>
       <p:sp>
         <p:nvSpPr>
@@ -10395,6 +10141,10 @@
             </a:stretch>
           </a:blipFill>
         </p:spPr>
+        <p:txBody>
+          <a:bodyPr/>
+          <a:p/>
+        </p:txBody>
       </p:sp>
       <p:sp>
         <p:nvSpPr>
@@ -10447,6 +10197,10 @@
             </a:stretch>
           </a:blipFill>
         </p:spPr>
+        <p:txBody>
+          <a:bodyPr/>
+          <a:p/>
+        </p:txBody>
       </p:sp>
       <p:grpSp>
         <p:nvGrpSpPr>
@@ -10595,6 +10349,10 @@
             </a:stretch>
           </a:blipFill>
         </p:spPr>
+        <p:txBody>
+          <a:bodyPr/>
+          <a:p/>
+        </p:txBody>
       </p:sp>
       <p:sp>
         <p:nvSpPr>
@@ -10647,6 +10405,10 @@
             </a:stretch>
           </a:blipFill>
         </p:spPr>
+        <p:txBody>
+          <a:bodyPr/>
+          <a:p/>
+        </p:txBody>
       </p:sp>
       <p:grpSp>
         <p:nvGrpSpPr>
@@ -10764,25 +10526,7 @@
             <a:spAutoFit/>
           </a:bodyPr>
           <a:lstStyle/>
-          <a:p>
-            <a:pPr algn="ctr">
-              <a:lnSpc>
-                <a:spcPts val="12599"/>
-              </a:lnSpc>
-            </a:pPr>
-            <a:r>
-              <a:rPr lang="en-US" b="true" sz="9000">
-                <a:solidFill>
-                  <a:srgbClr val="000000"/>
-                </a:solidFill>
-                <a:latin typeface="Proxima Nova Bold"/>
-                <a:ea typeface="Proxima Nova Bold"/>
-                <a:cs typeface="Proxima Nova Bold"/>
-                <a:sym typeface="Proxima Nova Bold"/>
-              </a:rPr>
-              <a:t>CONCLUSION</a:t>
-            </a:r>
-          </a:p>
+          <a:p/>
         </p:txBody>
       </p:sp>
       <p:sp>
@@ -10805,25 +10549,7 @@
             <a:spAutoFit/>
           </a:bodyPr>
           <a:lstStyle/>
-          <a:p>
-            <a:pPr algn="ctr">
-              <a:lnSpc>
-                <a:spcPts val="3919"/>
-              </a:lnSpc>
-            </a:pPr>
-            <a:r>
-              <a:rPr lang="en-US" sz="2799">
-                <a:solidFill>
-                  <a:srgbClr val="000000"/>
-                </a:solidFill>
-                <a:latin typeface="Nunito"/>
-                <a:ea typeface="Nunito"/>
-                <a:cs typeface="Nunito"/>
-                <a:sym typeface="Nunito"/>
-              </a:rPr>
-              <a:t>Lorem ipsum dolor sit amet, consectetur adipiscing elit. Praesent rutrum maximus mauris sed sodales. Ut rhoncus lacinia nisi eu tempus. Proin justo eros, mollis laoreet massa non, tincidunt pharetra leo. Cras facilisis leo non nibh congue volutpat. Fusce vitae sagittis dolor. Sed magna dolor, molestie vel libero id, tempus malesuada tortor.</a:t>
-            </a:r>
-          </a:p>
+          <a:p/>
         </p:txBody>
       </p:sp>
     </p:spTree>
